--- a/slides/The-Treasurer-Is-a-Smart-Contract.pptx
+++ b/slides/The-Treasurer-Is-a-Smart-Contract.pptx
@@ -1553,13 +1553,13 @@
           <a:p/>
           <a:p>
             <a:r>
-              <a:t>Presenter: DEMO 8, "Propose RotateKey 06 to 04b".</a:t>
+              <a:t>Presenter: DEMO 8, "Propose RotateKey 06 to 06b".</a:t>
             </a:r>
           </a:p>
           <a:p/>
           <a:p>
             <a:r>
-              <a:t>[Hand Sipho the spare card, 04b.]</a:t>
+              <a:t>[Hand Sipho the spare card, 06b.]</a:t>
             </a:r>
           </a:p>
           <a:p/>
@@ -1617,7 +1617,7 @@
           <a:p/>
           <a:p>
             <a:r>
-              <a:t>[Sipho scans 04b.]</a:t>
+              <a:t>[Sipho scans 06b.]</a:t>
             </a:r>
           </a:p>
           <a:p/>

--- a/slides/The-Treasurer-Is-a-Smart-Contract.pptx
+++ b/slides/The-Treasurer-Is-a-Smart-Contract.pptx
@@ -1371,18 +1371,13 @@
           <a:p/>
           <a:p>
             <a:r>
-              <a:t>I need four of you at the signing station. Any four. Scan your card, read the sentence, press</a:t>
+              <a:t>Any four of you: scan your card again, read the sentence, press Sign.</a:t>
             </a:r>
           </a:p>
+          <a:p/>
           <a:p>
             <a:r>
-              <a:t>Sign.</a:t>
-            </a:r>
-          </a:p>
-          <a:p/>
-          <a:p>
-            <a:r>
-              <a:t>[As the first slip shows:]</a:t>
+              <a:t>[As the first phone shows the slip:]</a:t>
             </a:r>
           </a:p>
           <a:p/>
@@ -1571,7 +1566,7 @@
           <a:p/>
           <a:p>
             <a:r>
-              <a:t>[Get four votes at the station, then execute.]</a:t>
+              <a:t>[Four volunteers scan and sign on their phones, then execute.]</a:t>
             </a:r>
           </a:p>
           <a:p/>
@@ -1589,7 +1584,7 @@
           <a:p/>
           <a:p>
             <a:r>
-              <a:t>Signing station: scan the old card 06.</a:t>
+              <a:t>Your phone: scan the old card 06.</a:t>
             </a:r>
           </a:p>
           <a:p/>
@@ -1617,7 +1612,7 @@
           <a:p/>
           <a:p>
             <a:r>
-              <a:t>[Sipho scans 06b.]</a:t>
+              <a:t>[Sipho scans 06b with a phone.]</a:t>
             </a:r>
           </a:p>
           <a:p/>
@@ -1875,7 +1870,17 @@
           <a:p/>
           <a:p>
             <a:r>
-              <a:t>And these cards should be passkeys. A phone that signs, not a QR you can photograph.</a:t>
+              <a:t>And these cards should be passkeys. Tonight you scanned a key into a website. That is exactly</a:t>
+            </a:r>
+          </a:p>
+          <a:p>
+            <a:r>
+              <a:t>what a crypto scam looks like, and in real life you never do it. A phone that signs, not a QR</a:t>
+            </a:r>
+          </a:p>
+          <a:p>
+            <a:r>
+              <a:t>you can photograph.</a:t>
             </a:r>
           </a:p>
           <a:p/>
@@ -2735,7 +2740,7 @@
           <a:p/>
           <a:p>
             <a:r>
-              <a:t>Before anything moves: everything you see tonight is the Investec sandbox and a test network.</a:t>
+              <a:t>Before anything moves: everything you see tonight is a simulated bank and a private test chain.</a:t>
             </a:r>
           </a:p>
           <a:p>
@@ -2768,24 +2773,35 @@
           <a:p/>
           <a:p>
             <a:r>
-              <a:t>[Point at the signing station.]</a:t>
+              <a:t>Committee, take out your phones. Turn your card over and point your camera at the QR on the</a:t>
             </a:r>
           </a:p>
+          <a:p>
+            <a:r>
+              <a:t>back. Tap the link it offers.</a:t>
+            </a:r>
+          </a:p>
           <a:p/>
           <a:p>
             <a:r>
-              <a:t>Lerato, come and be first. Turn your card over, hold the QR to the scanner.</a:t>
+              <a:t>Volunteers' phones: each opens /sign holding their card. Lerato's slip says "Lerato signs the</a:t>
             </a:r>
           </a:p>
+          <a:p>
+            <a:r>
+              <a:t>constitution of The Q4 Stokvel."</a:t>
+            </a:r>
+          </a:p>
           <a:p/>
           <a:p>
             <a:r>
-              <a:t>Signing station: scan card 01. The slip shows "Lerato signs the constitution of The Q4</a:t>
+              <a:t>Lerato, read me what your phone says.</a:t>
             </a:r>
           </a:p>
+          <a:p/>
           <a:p>
             <a:r>
-              <a:t>Stokvel." Press Sign.</a:t>
+              <a:t>[She reads it.]</a:t>
             </a:r>
           </a:p>
           <a:p/>
@@ -2796,46 +2812,46 @@
           </a:p>
           <a:p>
             <a:r>
-              <a:t>contract only accepts it because that card is member one. Press the button.</a:t>
+              <a:t>contract only accepts it because that card is member one. Press Sign.</a:t>
             </a:r>
           </a:p>
           <a:p/>
           <a:p>
             <a:r>
-              <a:t>[Wait for the minute book line: "Member joined".]</a:t>
+              <a:t>[Wait for the minute book line: "Member joined", and "✓ signed in" next to Lerato on the roster.]</a:t>
             </a:r>
           </a:p>
           <a:p/>
           <a:p>
             <a:r>
-              <a:t>And there it is on the right page. Nobody typed her name in. The chain knows her from the</a:t>
+              <a:t>And there she is on the right page. Signed in. Nobody typed her name in. The chain knows her</a:t>
             </a:r>
           </a:p>
           <a:p>
             <a:r>
-              <a:t>signature.</a:t>
+              <a:t>from the signature. Everybody else on the committee: Sign.</a:t>
             </a:r>
           </a:p>
           <a:p/>
           <a:p>
             <a:r>
-              <a:t>[Get the other five through the station quickly. Talk over it.]</a:t>
+              <a:t>[The other five land in a few seconds. Talk over it. If a phone won't scan, that card goes to</a:t>
             </a:r>
           </a:p>
+          <a:p>
+            <a:r>
+              <a:t>the signing station at the side.]</a:t>
+            </a:r>
+          </a:p>
           <a:p/>
           <a:p>
             <a:r>
-              <a:t>While the rest of the committee signs, everybody else: scan the QR on the screen. That's the</a:t>
+              <a:t>While they sign, everybody else: scan the QR on the screen. That's the audience page. Read only,</a:t>
             </a:r>
           </a:p>
           <a:p>
             <a:r>
-              <a:t>audience page. Read only, same as the projector, and every line links to the block explorer. You</a:t>
-            </a:r>
-          </a:p>
-          <a:p>
-            <a:r>
-              <a:t>don't have to take my word for any of this.</a:t>
+              <a:t>the same record the projector shows, live on your phone.</a:t>
             </a:r>
           </a:p>
         </p:txBody>
@@ -2995,38 +3011,28 @@
           <a:p/>
           <a:p>
             <a:r>
-              <a:t>If you're on the audience page, that event has a hash. Tap it. That's the contract, on a public</a:t>
+              <a:t>If you're on the audience page, that event has its transaction fingerprint next to it. That's</a:t>
             </a:r>
           </a:p>
           <a:p>
             <a:r>
-              <a:t>test network, telling you what just happened, without me in the way.</a:t>
+              <a:t>the contract's record of what just happened, not mine.</a:t>
             </a:r>
           </a:p>
           <a:p/>
           <a:p>
             <a:r>
-              <a:t>One honest note, because this is a room that will ask. Investec's sandbox is stateless. A</a:t>
+              <a:t>One honest note, because this is a room that will ask. The bank tonight is a mock of Investec's</a:t>
             </a:r>
           </a:p>
           <a:p>
             <a:r>
-              <a:t>transfer in the sandbox returns a real payment reference and then nothing changes. So on stage</a:t>
+              <a:t>API, the same calls and the same shapes. The relayer can't tell the difference, and that's the</a:t>
             </a:r>
           </a:p>
           <a:p>
             <a:r>
-              <a:t>the money moves in a mirror of the sandbox that speaks the same API, byte for byte, and every</a:t>
-            </a:r>
-          </a:p>
-          <a:p>
-            <a:r>
-              <a:t>payout is also sent to the real sandbox, which answers with a real reference. You'll see one</a:t>
-            </a:r>
-          </a:p>
-          <a:p>
-            <a:r>
-              <a:t>later. The relayer can't tell the difference, and that's the test.</a:t>
+              <a:t>test. The repo runs it against the real sandbox too.</a:t>
             </a:r>
           </a:p>
         </p:txBody>
@@ -16364,7 +16370,7 @@
                 </a:solidFill>
                 <a:latin typeface="JetBrains Mono"/>
               </a:rPr>
-              <a:t>live · sandbox and testnet only</a:t>
+              <a:t>live · simulated bank, private test chain</a:t>
             </a:r>
           </a:p>
         </p:txBody>
@@ -21396,7 +21402,7 @@
                 </a:solidFill>
                 <a:latin typeface="JetBrains Mono"/>
               </a:rPr>
-              <a:t>live · sandbox and testnet only</a:t>
+              <a:t>live · simulated bank, private test chain</a:t>
             </a:r>
           </a:p>
         </p:txBody>
@@ -27772,7 +27778,7 @@
                 </a:solidFill>
                 <a:latin typeface="JetBrains Mono"/>
               </a:rPr>
-              <a:t>live · sandbox and testnet only</a:t>
+              <a:t>live · simulated bank, private test chain</a:t>
             </a:r>
           </a:p>
         </p:txBody>
@@ -32804,7 +32810,7 @@
                 </a:solidFill>
                 <a:latin typeface="JetBrains Mono"/>
               </a:rPr>
-              <a:t>live · sandbox and testnet only</a:t>
+              <a:t>live · simulated bank, private test chain</a:t>
             </a:r>
           </a:p>
         </p:txBody>
@@ -37836,7 +37842,7 @@
                 </a:solidFill>
                 <a:latin typeface="JetBrains Mono"/>
               </a:rPr>
-              <a:t>live · sandbox and testnet only  ·  ✂ can be cut</a:t>
+              <a:t>live · simulated bank, private test chain  ·  ✂ can be cut</a:t>
             </a:r>
           </a:p>
         </p:txBody>
@@ -53841,7 +53847,7 @@
                 </a:solidFill>
                 <a:latin typeface="JetBrains Mono"/>
               </a:rPr>
-              <a:t>live · sandbox and testnet only</a:t>
+              <a:t>live · simulated bank, private test chain</a:t>
             </a:r>
           </a:p>
         </p:txBody>
@@ -53958,7 +53964,7 @@
                 </a:solidFill>
                 <a:latin typeface="Inter"/>
               </a:rPr>
-              <a:t>Six volunteers, six cards, one constitution. Nobody types a name in: the chain knows each member from a signature.</a:t>
+              <a:t>Six volunteers, six cards, six phones, one constitution. Nobody types a name in: the chain knows each member from a signature.</a:t>
             </a:r>
           </a:p>
         </p:txBody>
@@ -58873,7 +58879,7 @@
                 </a:solidFill>
                 <a:latin typeface="JetBrains Mono"/>
               </a:rPr>
-              <a:t>live · sandbox and testnet only</a:t>
+              <a:t>live · simulated bank, private test chain</a:t>
             </a:r>
           </a:p>
         </p:txBody>

--- a/slides/The-Treasurer-Is-a-Smart-Contract.pptx
+++ b/slides/The-Treasurer-Is-a-Smart-Contract.pptx
@@ -648,7 +648,7 @@
           <a:p/>
           <a:p>
             <a:r>
-              <a:t>Presenter: "before DEMO 3", click through the remaining members.</a:t>
+              <a:t>Run sheet: "before DEMO 3", click through the remaining members.</a:t>
             </a:r>
           </a:p>
           <a:p/>
@@ -682,7 +682,7 @@
           <a:p/>
           <a:p>
             <a:r>
-              <a:t>Presenter: DEMO 3, "Skip to month end and settle".</a:t>
+              <a:t>Run sheet: DEMO 3, "Skip to month end and settle".</a:t>
             </a:r>
           </a:p>
           <a:p/>
@@ -837,7 +837,7 @@
           <a:p/>
           <a:p>
             <a:r>
-              <a:t>Presenter: "before DEMO 3" buttons again for the new month, then DEMO 4, "Take R1,000 out,</a:t>
+              <a:t>Run sheet: "before DEMO 3" buttons again for the new month, then DEMO 4, "Take R1,000 out,</a:t>
             </a:r>
           </a:p>
           <a:p>
@@ -893,7 +893,7 @@
           <a:p/>
           <a:p>
             <a:r>
-              <a:t>Presenter: DEMO 4, "Try to close the round".</a:t>
+              <a:t>Run sheet: DEMO 4, "Try to close the round".</a:t>
             </a:r>
           </a:p>
           <a:p/>
@@ -933,7 +933,7 @@
           <a:p/>
           <a:p>
             <a:r>
-              <a:t>Presenter: DEMO 4, "Put it back".</a:t>
+              <a:t>Run sheet: DEMO 4, "Put it back".</a:t>
             </a:r>
           </a:p>
           <a:p/>
@@ -1060,7 +1060,7 @@
           <a:p/>
           <a:p>
             <a:r>
-              <a:t>Presenter: DEMO 5, "V1: same transaction twice".</a:t>
+              <a:t>Run sheet: DEMO 5, "V1: same transaction twice".</a:t>
             </a:r>
           </a:p>
           <a:p/>
@@ -1088,7 +1088,7 @@
           <a:p/>
           <a:p>
             <a:r>
-              <a:t>Presenter: DEMO 5, "V2: same webhook twice".</a:t>
+              <a:t>Run sheet: DEMO 5, "V2: same webhook twice".</a:t>
             </a:r>
           </a:p>
           <a:p/>
@@ -1359,7 +1359,7 @@
           <a:p/>
           <a:p>
             <a:r>
-              <a:t>Presenter: DEMO 7, "Propose R5,000 to R6,000".</a:t>
+              <a:t>Run sheet: DEMO 7, "Propose R5,000 to R6,000".</a:t>
             </a:r>
           </a:p>
           <a:p/>
@@ -1427,7 +1427,7 @@
           <a:p/>
           <a:p>
             <a:r>
-              <a:t>Presenter: DEMO 7, "Execute".</a:t>
+              <a:t>Run sheet: DEMO 7, "Execute".</a:t>
             </a:r>
           </a:p>
           <a:p/>
@@ -1548,7 +1548,7 @@
           <a:p/>
           <a:p>
             <a:r>
-              <a:t>Presenter: DEMO 8, "Propose RotateKey 06 to 06b".</a:t>
+              <a:t>Run sheet: DEMO 8, "Propose RotateKey 06 to 06b".</a:t>
             </a:r>
           </a:p>
           <a:p/>
@@ -1572,7 +1572,7 @@
           <a:p/>
           <a:p>
             <a:r>
-              <a:t>Presenter: DEMO 8, execute after the timelock.</a:t>
+              <a:t>Run sheet: DEMO 8, execute after the timelock.</a:t>
             </a:r>
           </a:p>
           <a:p/>
@@ -1721,7 +1721,7 @@
           <a:p/>
           <a:p>
             <a:r>
-              <a:t>Presenter: DEMO 9, "Stop the relayer".</a:t>
+              <a:t>Run sheet: DEMO 9, "Stop the relayer".</a:t>
             </a:r>
           </a:p>
           <a:p/>
@@ -2933,7 +2933,7 @@
           <a:p/>
           <a:p>
             <a:r>
-              <a:t>Presenter: DEMO 2, "Aisha swipes R87 at the bakery".</a:t>
+              <a:t>Run sheet: DEMO 2, "Aisha swipes R87 at the bakery".</a:t>
             </a:r>
           </a:p>
           <a:p/>

--- a/slides/The-Treasurer-Is-a-Smart-Contract.pptx
+++ b/slides/The-Treasurer-Is-a-Smart-Contract.pptx
@@ -648,7 +648,7 @@
           <a:p/>
           <a:p>
             <a:r>
-              <a:t>Run sheet: "before DEMO 3", click through the remaining members.</a:t>
+              <a:t>Run sheet: pay all</a:t>
             </a:r>
           </a:p>
           <a:p/>
@@ -682,7 +682,7 @@
           <a:p/>
           <a:p>
             <a:r>
-              <a:t>Run sheet: DEMO 3, "Skip to month end and settle".</a:t>
+              <a:t>Run sheet: monthend</a:t>
             </a:r>
           </a:p>
           <a:p/>
@@ -837,12 +837,7 @@
           <a:p/>
           <a:p>
             <a:r>
-              <a:t>Run sheet: "before DEMO 3" buttons again for the new month, then DEMO 4, "Take R1,000 out,</a:t>
-            </a:r>
-          </a:p>
-          <a:p>
-            <a:r>
-              <a:t>then attest".</a:t>
+              <a:t>Run sheet: pay all, then steal 1000</a:t>
             </a:r>
           </a:p>
           <a:p/>
@@ -893,7 +888,7 @@
           <a:p/>
           <a:p>
             <a:r>
-              <a:t>Run sheet: DEMO 4, "Try to close the round".</a:t>
+              <a:t>Run sheet: close</a:t>
             </a:r>
           </a:p>
           <a:p/>
@@ -933,7 +928,7 @@
           <a:p/>
           <a:p>
             <a:r>
-              <a:t>Run sheet: DEMO 4, "Put it back".</a:t>
+              <a:t>Run sheet: putback</a:t>
             </a:r>
           </a:p>
           <a:p/>
@@ -1060,7 +1055,7 @@
           <a:p/>
           <a:p>
             <a:r>
-              <a:t>Run sheet: DEMO 5, "V1: same transaction twice".</a:t>
+              <a:t>Run sheet: double v1</a:t>
             </a:r>
           </a:p>
           <a:p/>
@@ -1088,7 +1083,7 @@
           <a:p/>
           <a:p>
             <a:r>
-              <a:t>Run sheet: DEMO 5, "V2: same webhook twice".</a:t>
+              <a:t>Run sheet: double v2</a:t>
             </a:r>
           </a:p>
           <a:p/>
@@ -1359,7 +1354,7 @@
           <a:p/>
           <a:p>
             <a:r>
-              <a:t>Run sheet: DEMO 7, "Propose R5,000 to R6,000".</a:t>
+              <a:t>Run sheet: propose raise</a:t>
             </a:r>
           </a:p>
           <a:p/>
@@ -1427,7 +1422,7 @@
           <a:p/>
           <a:p>
             <a:r>
-              <a:t>Run sheet: DEMO 7, "Execute".</a:t>
+              <a:t>Run sheet: execute</a:t>
             </a:r>
           </a:p>
           <a:p/>
@@ -1548,7 +1543,7 @@
           <a:p/>
           <a:p>
             <a:r>
-              <a:t>Run sheet: DEMO 8, "Propose RotateKey 06 to 06b".</a:t>
+              <a:t>Run sheet: propose rotate</a:t>
             </a:r>
           </a:p>
           <a:p/>
@@ -1572,7 +1567,7 @@
           <a:p/>
           <a:p>
             <a:r>
-              <a:t>Run sheet: DEMO 8, execute after the timelock.</a:t>
+              <a:t>Run sheet: execute</a:t>
             </a:r>
           </a:p>
           <a:p/>
@@ -1721,7 +1716,7 @@
           <a:p/>
           <a:p>
             <a:r>
-              <a:t>Run sheet: DEMO 9, "Stop the relayer".</a:t>
+              <a:t>Run sheet: kill</a:t>
             </a:r>
           </a:p>
           <a:p/>
@@ -2933,7 +2928,7 @@
           <a:p/>
           <a:p>
             <a:r>
-              <a:t>Run sheet: DEMO 2, "Aisha swipes R87 at the bakery".</a:t>
+              <a:t>Run sheet: swipe aisha 87</a:t>
             </a:r>
           </a:p>
           <a:p/>

--- a/slides/The-Treasurer-Is-a-Smart-Contract.pptx
+++ b/slides/The-Treasurer-Is-a-Smart-Contract.pptx
@@ -2768,6 +2768,28 @@
           <a:p/>
           <a:p>
             <a:r>
+              <a:t>Run sheet: zoom constitution</a:t>
+            </a:r>
+          </a:p>
+          <a:p/>
+          <a:p>
+            <a:r>
+              <a:t>This is the club's constitution. Seven rules, and six empty lines at the bottom. The contract</a:t>
+            </a:r>
+          </a:p>
+          <a:p>
+            <a:r>
+              <a:t>holds the fingerprint of exactly this text, so nobody can later claim you agreed to something</a:t>
+            </a:r>
+          </a:p>
+          <a:p>
+            <a:r>
+              <a:t>else.</a:t>
+            </a:r>
+          </a:p>
+          <a:p/>
+          <a:p>
+            <a:r>
               <a:t>Committee, take out your phones. Turn your card over and point your camera at the QR on the</a:t>
             </a:r>
           </a:p>
@@ -2813,13 +2835,13 @@
           <a:p/>
           <a:p>
             <a:r>
-              <a:t>[Wait for the minute book line: "Member joined", and "✓ signed in" next to Lerato on the roster.]</a:t>
+              <a:t>[Wait for Lerato's name to land on her signature line.]</a:t>
             </a:r>
           </a:p>
           <a:p/>
           <a:p>
             <a:r>
-              <a:t>And there she is on the right page. Signed in. Nobody typed her name in. The chain knows her</a:t>
+              <a:t>And there she is, on her line. Signed. Nobody typed her name in. The chain knows her</a:t>
             </a:r>
           </a:p>
           <a:p>
@@ -2835,7 +2857,24 @@
           </a:p>
           <a:p>
             <a:r>
-              <a:t>the signing station at the side.]</a:t>
+              <a:t>the signing station at the side. The sixth signature brings up "Everyone has signed the</a:t>
+            </a:r>
+          </a:p>
+          <a:p>
+            <a:r>
+              <a:t>constitution". Let it sit for a beat.]</a:t>
+            </a:r>
+          </a:p>
+          <a:p/>
+          <a:p>
+            <a:r>
+              <a:t>Six strangers, one set of rules, and every signature their own. That's a stokvel.</a:t>
+            </a:r>
+          </a:p>
+          <a:p/>
+          <a:p>
+            <a:r>
+              <a:t>Run sheet: zoom all</a:t>
             </a:r>
           </a:p>
           <a:p/>
